--- a/curso_es/pptx/S30.pptx
+++ b/curso_es/pptx/S30.pptx
@@ -4186,7 +4186,7 @@
                 </a:solidFill>
                 <a:latin typeface="Nunito Sans"/>
               </a:rPr>
-              <a:t>Anuncio inventado: «El doctor Ramos, famoso en TikTok, recomienda ZenSleep para dormir. ¡Ya lo usan un millón de personas!»</a:t>
+              <a:t>Anuncio inventado: «Un doctor famoso en TikTok recomienda ZenSleep para dormir. ¡Ya lo usan un millón de personas!»</a:t>
             </a:r>
           </a:p>
         </p:txBody>
@@ -4495,7 +4495,7 @@
                 </a:solidFill>
                 <a:latin typeface="Nunito Sans"/>
               </a:rPr>
-              <a:t>Omar: «Sanidad y casi todos los médicos dicen que fumar causa cáncer, y lo repite todo el mundo. ¡Falacia de autoridad y ad populum!».</a:t>
+              <a:t>Un chico: «Sanidad y casi todos los médicos dicen que fumar causa cáncer, y lo repite todo el mundo. ¡Falacia de autoridad y ad populum!».</a:t>
             </a:r>
           </a:p>
         </p:txBody>
@@ -4543,7 +4543,7 @@
                 </a:solidFill>
                 <a:latin typeface="Nunito Sans"/>
               </a:rPr>
-              <a:t>Hay expertos y hay «todo el mundo»… ¿tiene razón Omar?</a:t>
+              <a:t>Hay expertos y hay «todo el mundo»… ¿tiene razón ese chico?</a:t>
             </a:r>
           </a:p>
           <a:p>
@@ -5607,7 +5607,7 @@
                 </a:solidFill>
                 <a:latin typeface="Nunito Sans"/>
               </a:rPr>
-              <a:t>En el experimento de Asch, unas 3 de cada ______ personas siguieron al grupo al menos una vez.  (sesión 29)</a:t>
+              <a:t>En el experimento de las líneas, unas 3 de cada ______ personas siguieron al grupo al menos una vez.  (sesión 29)</a:t>
             </a:r>
           </a:p>
           <a:p>
@@ -5632,7 +5632,7 @@
                 </a:solidFill>
                 <a:latin typeface="Nunito Sans"/>
               </a:rPr>
-              <a:t>En la versión más conocida del experimento de Milgram, el ______ % llegó hasta la descarga más fuerte.  (sesión 29)</a:t>
+              <a:t>En la versión más conocida del experimento de las descargas, el ______ % llegó hasta la descarga más fuerte.  (sesión 29)</a:t>
             </a:r>
           </a:p>
           <a:p>
@@ -5809,7 +5809,7 @@
                 </a:solidFill>
                 <a:latin typeface="Nunito Sans"/>
               </a:rPr>
-              <a:t>En el experimento de Asch, unas 3 de cada </a:t>
+              <a:t>En el experimento de las líneas, unas 3 de cada </a:t>
             </a:r>
             <a:r>
               <a:rPr sz="2600" b="1">
@@ -5852,7 +5852,7 @@
                 </a:solidFill>
                 <a:latin typeface="Nunito Sans"/>
               </a:rPr>
-              <a:t>En la versión más conocida del experimento de Milgram, el </a:t>
+              <a:t>En la versión más conocida del experimento de las descargas, el </a:t>
             </a:r>
             <a:r>
               <a:rPr sz="2600" b="1">
@@ -7197,7 +7197,7 @@
                           </a:solidFill>
                           <a:latin typeface="Nunito Sans"/>
                         </a:rPr>
-                        <a:t>De autoridad (ad verecundiam)</a:t>
+                        <a:t>De autoridad</a:t>
                       </a:r>
                     </a:p>
                   </a:txBody>
@@ -7265,7 +7265,7 @@
                           </a:solidFill>
                           <a:latin typeface="Nunito Sans"/>
                         </a:rPr>
-                        <a:t>De la mayoría (ad populum)</a:t>
+                        <a:t>De la mayoría</a:t>
                       </a:r>
                     </a:p>
                   </a:txBody>
